--- a/docs/presentation/solr-intellij-plugin.pptx
+++ b/docs/presentation/solr-intellij-plugin.pptx
@@ -31,7 +31,9 @@
     <p:sldId id="279" r:id="rId25"/>
     <p:sldId id="280" r:id="rId26"/>
     <p:sldId id="281" r:id="rId27"/>
+    <p:sldId id="293" r:id="rId44"/>
     <p:sldId id="282" r:id="rId28"/>
+    <p:sldId id="294" r:id="rId45"/>
     <p:sldId id="283" r:id="rId29"/>
     <p:sldId id="284" r:id="rId30"/>
     <p:sldId id="285" r:id="rId31"/>
@@ -40,6 +42,7 @@
     <p:sldId id="288" r:id="rId34"/>
     <p:sldId id="289" r:id="rId35"/>
     <p:sldId id="290" r:id="rId36"/>
+    <p:sldId id="295" r:id="rId46"/>
     <p:sldId id="291" r:id="rId37"/>
     <p:sldId id="292" r:id="rId38"/>
   </p:sldIdLst>
@@ -15260,7 +15263,7 @@
                 <a:ea typeface="Calibri" pitchFamily="34" charset="-122"/>
                 <a:cs typeface="Calibri" pitchFamily="34" charset="-120"/>
               </a:rPr>
-              <a:t>27</a:t>
+              <a:t>28</a:t>
             </a:r>
             <a:endParaRPr lang="en-US" sz="900" dirty="0"/>
           </a:p>
@@ -15660,7 +15663,7 @@
                 <a:ea typeface="Calibri" pitchFamily="34" charset="-122"/>
                 <a:cs typeface="Calibri" pitchFamily="34" charset="-120"/>
               </a:rPr>
-              <a:t>28</a:t>
+              <a:t>30</a:t>
             </a:r>
             <a:endParaRPr lang="en-US" sz="900" dirty="0"/>
           </a:p>
@@ -16012,7 +16015,7 @@
                 <a:ea typeface="Calibri" pitchFamily="34" charset="-122"/>
                 <a:cs typeface="Calibri" pitchFamily="34" charset="-120"/>
               </a:rPr>
-              <a:t>29</a:t>
+              <a:t>31</a:t>
             </a:r>
             <a:endParaRPr lang="en-US" sz="900" dirty="0"/>
           </a:p>
@@ -17070,7 +17073,7 @@
                 <a:ea typeface="Calibri" pitchFamily="34" charset="-122"/>
                 <a:cs typeface="Calibri" pitchFamily="34" charset="-120"/>
               </a:rPr>
-              <a:t>30</a:t>
+              <a:t>32</a:t>
             </a:r>
             <a:endParaRPr lang="en-US" sz="900" dirty="0"/>
           </a:p>
@@ -17957,7 +17960,7 @@
                 <a:ea typeface="Calibri" pitchFamily="34" charset="-122"/>
                 <a:cs typeface="Calibri" pitchFamily="34" charset="-120"/>
               </a:rPr>
-              <a:t>31</a:t>
+              <a:t>33</a:t>
             </a:r>
             <a:endParaRPr lang="en-US" sz="900" dirty="0"/>
           </a:p>
@@ -18657,7 +18660,7 @@
                 <a:ea typeface="Calibri" pitchFamily="34" charset="-122"/>
                 <a:cs typeface="Calibri" pitchFamily="34" charset="-120"/>
               </a:rPr>
-              <a:t>32</a:t>
+              <a:t>34</a:t>
             </a:r>
             <a:endParaRPr lang="en-US" sz="900" dirty="0"/>
           </a:p>
@@ -19034,7 +19037,7 @@
                 <a:ea typeface="Calibri" pitchFamily="34" charset="-122"/>
                 <a:cs typeface="Calibri" pitchFamily="34" charset="-120"/>
               </a:rPr>
-              <a:t>33</a:t>
+              <a:t>35</a:t>
             </a:r>
             <a:endParaRPr lang="en-US" sz="900" dirty="0"/>
           </a:p>
@@ -19582,7 +19585,7 @@
                 <a:ea typeface="Calibri" pitchFamily="34" charset="-122"/>
                 <a:cs typeface="Calibri" pitchFamily="34" charset="-120"/>
               </a:rPr>
-              <a:t>34</a:t>
+              <a:t>36</a:t>
             </a:r>
             <a:endParaRPr lang="en-US" sz="900" dirty="0"/>
           </a:p>
@@ -20640,7 +20643,7 @@
                 <a:ea typeface="Calibri" pitchFamily="34" charset="-122"/>
                 <a:cs typeface="Calibri" pitchFamily="34" charset="-120"/>
               </a:rPr>
-              <a:t>35</a:t>
+              <a:t>37</a:t>
             </a:r>
             <a:endParaRPr lang="en-US" sz="900" dirty="0"/>
           </a:p>
@@ -21040,7 +21043,7 @@
                 <a:ea typeface="Calibri" pitchFamily="34" charset="-122"/>
                 <a:cs typeface="Calibri" pitchFamily="34" charset="-120"/>
               </a:rPr>
-              <a:t>36</a:t>
+              <a:t>39</a:t>
             </a:r>
             <a:endParaRPr lang="en-US" sz="900" dirty="0"/>
           </a:p>
@@ -21311,12 +21314,414 @@
                 <a:ea typeface="Calibri" pitchFamily="34" charset="-122"/>
                 <a:cs typeface="Calibri" pitchFamily="34" charset="-120"/>
               </a:rPr>
-              <a:t>37</a:t>
+              <a:t>40</a:t>
             </a:r>
             <a:endParaRPr lang="en-US" sz="900" dirty="0"/>
           </a:p>
         </p:txBody>
       </p:sp>
+    </p:spTree>
+  </p:cSld>
+  <p:clrMapOvr>
+    <a:masterClrMapping/>
+  </p:clrMapOvr>
+</p:sld>
+</file>
+
+<file path=ppt/slides/slide38.xml><?xml version="1.0" encoding="utf-8"?>
+<p:sld xmlns:a="http://schemas.openxmlformats.org/drawingml/2006/main" xmlns:p="http://schemas.openxmlformats.org/presentationml/2006/main" xmlns:r="http://schemas.openxmlformats.org/officeDocument/2006/relationships">
+  <p:cSld>
+    <p:spTree>
+      <p:nvGrpSpPr>
+        <p:cNvPr id="1" name=""/>
+        <p:cNvGrpSpPr/>
+        <p:nvPr/>
+      </p:nvGrpSpPr>
+      <p:grpSpPr/>
+      <p:sp>
+        <p:nvSpPr>
+          <p:cNvPr id="2" name="Text 0"/>
+          <p:cNvSpPr/>
+          <p:nvPr/>
+        </p:nvSpPr>
+        <p:spPr>
+          <a:xfrm>
+            <a:off x="640080" y="365760"/>
+            <a:ext cx="10789920" cy="310896"/>
+          </a:xfrm>
+          <a:prstGeom prst="rect">
+            <a:avLst/>
+          </a:prstGeom>
+          <a:noFill/>
+          <a:ln/>
+        </p:spPr>
+        <p:txBody>
+          <a:bodyPr wrap="square" rtlCol="0" anchor="ctr"/>
+          <a:lstStyle/>
+          <a:p>
+            <a:pPr indent="0" marL="0">
+              <a:buNone/>
+            </a:pPr>
+            <a:r>
+              <a:rPr lang="en-US" sz="1200" b="1" spc="150" kern="0" dirty="0">
+                <a:solidFill>
+                  <a:srgbClr val="D9531E"/>
+                </a:solidFill>
+                <a:latin typeface="Calibri" pitchFamily="34" charset="0"/>
+                <a:ea typeface="Calibri" pitchFamily="34" charset="-122"/>
+                <a:cs typeface="Calibri" pitchFamily="34" charset="-120"/>
+              </a:rPr>
+              <a:t>ACT 2 · PLUGIN DEV</a:t>
+            </a:r>
+            <a:endParaRPr lang="en-US" sz="1200" dirty="0"/>
+          </a:p>
+        </p:txBody>
+      </p:sp>
+      <p:sp>
+        <p:nvSpPr>
+          <p:cNvPr id="3" name="Text 1"/>
+          <p:cNvSpPr/>
+          <p:nvPr/>
+        </p:nvSpPr>
+        <p:spPr>
+          <a:xfrm>
+            <a:off x="621792" y="621792"/>
+            <a:ext cx="10927080" cy="914400"/>
+          </a:xfrm>
+          <a:prstGeom prst="rect">
+            <a:avLst/>
+          </a:prstGeom>
+          <a:noFill/>
+          <a:ln/>
+        </p:spPr>
+        <p:txBody>
+          <a:bodyPr wrap="square" rtlCol="0" anchor="ctr"/>
+          <a:lstStyle/>
+          <a:p>
+            <a:pPr indent="0" marL="0">
+              <a:lnSpc>
+                <a:spcPct val="103000"/>
+              </a:lnSpc>
+              <a:buNone/>
+            </a:pPr>
+            <a:r>
+              <a:rPr lang="en-US" sz="2200" b="1" dirty="0">
+                <a:solidFill>
+                  <a:srgbClr val="1B2340"/>
+                </a:solidFill>
+                <a:latin typeface="Cambria" pitchFamily="34" charset="0"/>
+                <a:ea typeface="Cambria" pitchFamily="34" charset="-122"/>
+                <a:cs typeface="Cambria" pitchFamily="34" charset="-120"/>
+              </a:rPr>
+              <a:t>Declaring dumb-awareness is half the contract — the guard is the other half</a:t>
+            </a:r>
+            <a:endParaRPr lang="en-US" sz="2200" dirty="0"/>
+          </a:p>
+        </p:txBody>
+      </p:sp>
+      <p:sp>
+        <p:nvSpPr>
+          <p:cNvPr id="5" name="Text 3"/>
+          <p:cNvSpPr/>
+          <p:nvPr/>
+        </p:nvSpPr>
+        <p:spPr>
+          <a:xfrm>
+            <a:off x="640080" y="6199632"/>
+            <a:ext cx="10607040" cy="274320"/>
+          </a:xfrm>
+          <a:prstGeom prst="rect">
+            <a:avLst/>
+          </a:prstGeom>
+          <a:noFill/>
+          <a:ln/>
+        </p:spPr>
+        <p:txBody>
+          <a:bodyPr wrap="square" rtlCol="0" anchor="ctr"/>
+          <a:lstStyle/>
+          <a:p>
+            <a:pPr indent="0" marL="0">
+              <a:buNone/>
+            </a:pPr>
+            <a:r>
+              <a:rPr lang="en-US" sz="950" i="1" dirty="0">
+                <a:solidFill>
+                  <a:srgbClr val="5B6478"/>
+                </a:solidFill>
+                <a:latin typeface="Calibri" pitchFamily="34" charset="0"/>
+                <a:ea typeface="Calibri" pitchFamily="34" charset="-122"/>
+                <a:cs typeface="Calibri" pitchFamily="34" charset="-120"/>
+              </a:rPr>
+              <a:t>Source: docs/platform-mechanisms.md “Dumb mode, and DumbAware”; configset/navigation/SolrClassReferenceContributor.kt</a:t>
+            </a:r>
+            <a:endParaRPr lang="en-US" sz="950" dirty="0"/>
+          </a:p>
+        </p:txBody>
+      </p:sp>
+      <p:sp>
+        <p:nvSpPr>
+          <p:cNvPr id="7" name="Text 4"/>
+          <p:cNvSpPr/>
+          <p:nvPr/>
+        </p:nvSpPr>
+        <p:spPr>
+          <a:xfrm>
+            <a:off x="11368735" y="6473952"/>
+            <a:ext cx="457200" cy="274320"/>
+          </a:xfrm>
+          <a:prstGeom prst="rect">
+            <a:avLst/>
+          </a:prstGeom>
+          <a:noFill/>
+          <a:ln/>
+        </p:spPr>
+        <p:txBody>
+          <a:bodyPr wrap="square" rtlCol="0" anchor="ctr"/>
+          <a:lstStyle/>
+          <a:p>
+            <a:pPr algn="r" indent="0" marL="0">
+              <a:buNone/>
+            </a:pPr>
+            <a:r>
+              <a:rPr lang="en-US" sz="900" dirty="0">
+                <a:solidFill>
+                  <a:srgbClr val="5B6478"/>
+                </a:solidFill>
+                <a:latin typeface="Calibri" pitchFamily="34" charset="0"/>
+                <a:ea typeface="Calibri" pitchFamily="34" charset="-122"/>
+                <a:cs typeface="Calibri" pitchFamily="34" charset="-120"/>
+              </a:rPr>
+              <a:t>27</a:t>
+            </a:r>
+            <a:endParaRPr lang="en-US" sz="900" dirty="0"/>
+          </a:p>
+        </p:txBody>
+      </p:sp>
+      <p:pic>
+        <p:nvPicPr>
+          <p:cNvPr id="8" name="Picture 7" descr="seq-05-dumb-mode.png"/>
+          <p:cNvPicPr>
+            <a:picLocks noChangeAspect="1"/>
+          </p:cNvPicPr>
+          <p:nvPr/>
+        </p:nvPicPr>
+        <p:blipFill>
+          <a:blip r:embed="rId2"/>
+          <a:stretch>
+            <a:fillRect/>
+          </a:stretch>
+        </p:blipFill>
+        <p:spPr>
+          <a:xfrm>
+            <a:off x="2515020" y="1560000"/>
+            <a:ext cx="7161959" cy="4560000"/>
+          </a:xfrm>
+          <a:prstGeom prst="rect">
+            <a:avLst/>
+          </a:prstGeom>
+        </p:spPr>
+      </p:pic>
+    </p:spTree>
+  </p:cSld>
+  <p:clrMapOvr>
+    <a:masterClrMapping/>
+  </p:clrMapOvr>
+</p:sld>
+</file>
+
+<file path=ppt/slides/slide39.xml><?xml version="1.0" encoding="utf-8"?>
+<p:sld xmlns:a="http://schemas.openxmlformats.org/drawingml/2006/main" xmlns:p="http://schemas.openxmlformats.org/presentationml/2006/main" xmlns:r="http://schemas.openxmlformats.org/officeDocument/2006/relationships">
+  <p:cSld>
+    <p:spTree>
+      <p:nvGrpSpPr>
+        <p:cNvPr id="1" name=""/>
+        <p:cNvGrpSpPr/>
+        <p:nvPr/>
+      </p:nvGrpSpPr>
+      <p:grpSpPr/>
+      <p:sp>
+        <p:nvSpPr>
+          <p:cNvPr id="2" name="Text 0"/>
+          <p:cNvSpPr/>
+          <p:nvPr/>
+        </p:nvSpPr>
+        <p:spPr>
+          <a:xfrm>
+            <a:off x="640080" y="365760"/>
+            <a:ext cx="10789920" cy="310896"/>
+          </a:xfrm>
+          <a:prstGeom prst="rect">
+            <a:avLst/>
+          </a:prstGeom>
+          <a:noFill/>
+          <a:ln/>
+        </p:spPr>
+        <p:txBody>
+          <a:bodyPr wrap="square" rtlCol="0" anchor="ctr"/>
+          <a:lstStyle/>
+          <a:p>
+            <a:pPr indent="0" marL="0">
+              <a:buNone/>
+            </a:pPr>
+            <a:r>
+              <a:rPr lang="en-US" sz="1200" b="1" spc="150" kern="0" dirty="0">
+                <a:solidFill>
+                  <a:srgbClr val="D9531E"/>
+                </a:solidFill>
+                <a:latin typeface="Calibri" pitchFamily="34" charset="0"/>
+                <a:ea typeface="Calibri" pitchFamily="34" charset="-122"/>
+                <a:cs typeface="Calibri" pitchFamily="34" charset="-120"/>
+              </a:rPr>
+              <a:t>ACT 2 · PLUGIN DEV</a:t>
+            </a:r>
+            <a:endParaRPr lang="en-US" sz="1200" dirty="0"/>
+          </a:p>
+        </p:txBody>
+      </p:sp>
+      <p:sp>
+        <p:nvSpPr>
+          <p:cNvPr id="3" name="Text 1"/>
+          <p:cNvSpPr/>
+          <p:nvPr/>
+        </p:nvSpPr>
+        <p:spPr>
+          <a:xfrm>
+            <a:off x="621792" y="621792"/>
+            <a:ext cx="10927080" cy="914400"/>
+          </a:xfrm>
+          <a:prstGeom prst="rect">
+            <a:avLst/>
+          </a:prstGeom>
+          <a:noFill/>
+          <a:ln/>
+        </p:spPr>
+        <p:txBody>
+          <a:bodyPr wrap="square" rtlCol="0" anchor="ctr"/>
+          <a:lstStyle/>
+          <a:p>
+            <a:pPr indent="0" marL="0">
+              <a:lnSpc>
+                <a:spcPct val="103000"/>
+              </a:lnSpc>
+              <a:buNone/>
+            </a:pPr>
+            <a:r>
+              <a:rPr lang="en-US" sz="2200" b="1" dirty="0">
+                <a:solidFill>
+                  <a:srgbClr val="1B2340"/>
+                </a:solidFill>
+                <a:latin typeface="Cambria" pitchFamily="34" charset="0"/>
+                <a:ea typeface="Cambria" pitchFamily="34" charset="-122"/>
+                <a:cs typeface="Cambria" pitchFamily="34" charset="-120"/>
+              </a:rPr>
+              <a:t>One model, every feature — and the platform decides when to throw it away</a:t>
+            </a:r>
+            <a:endParaRPr lang="en-US" sz="2200" dirty="0"/>
+          </a:p>
+        </p:txBody>
+      </p:sp>
+      <p:sp>
+        <p:nvSpPr>
+          <p:cNvPr id="5" name="Text 3"/>
+          <p:cNvSpPr/>
+          <p:nvPr/>
+        </p:nvSpPr>
+        <p:spPr>
+          <a:xfrm>
+            <a:off x="640080" y="6199632"/>
+            <a:ext cx="10607040" cy="274320"/>
+          </a:xfrm>
+          <a:prstGeom prst="rect">
+            <a:avLst/>
+          </a:prstGeom>
+          <a:noFill/>
+          <a:ln/>
+        </p:spPr>
+        <p:txBody>
+          <a:bodyPr wrap="square" rtlCol="0" anchor="ctr"/>
+          <a:lstStyle/>
+          <a:p>
+            <a:pPr indent="0" marL="0">
+              <a:buNone/>
+            </a:pPr>
+            <a:r>
+              <a:rPr lang="en-US" sz="950" i="1" dirty="0">
+                <a:solidFill>
+                  <a:srgbClr val="5B6478"/>
+                </a:solidFill>
+                <a:latin typeface="Calibri" pitchFamily="34" charset="0"/>
+                <a:ea typeface="Calibri" pitchFamily="34" charset="-122"/>
+                <a:cs typeface="Calibri" pitchFamily="34" charset="-120"/>
+              </a:rPr>
+              <a:t>Source: docs/platform-mechanisms.md “Caching the field model”; configset/reading/SolrConfigsetReader.kt</a:t>
+            </a:r>
+            <a:endParaRPr lang="en-US" sz="950" dirty="0"/>
+          </a:p>
+        </p:txBody>
+      </p:sp>
+      <p:sp>
+        <p:nvSpPr>
+          <p:cNvPr id="7" name="Text 4"/>
+          <p:cNvSpPr/>
+          <p:nvPr/>
+        </p:nvSpPr>
+        <p:spPr>
+          <a:xfrm>
+            <a:off x="11368735" y="6473952"/>
+            <a:ext cx="457200" cy="274320"/>
+          </a:xfrm>
+          <a:prstGeom prst="rect">
+            <a:avLst/>
+          </a:prstGeom>
+          <a:noFill/>
+          <a:ln/>
+        </p:spPr>
+        <p:txBody>
+          <a:bodyPr wrap="square" rtlCol="0" anchor="ctr"/>
+          <a:lstStyle/>
+          <a:p>
+            <a:pPr algn="r" indent="0" marL="0">
+              <a:buNone/>
+            </a:pPr>
+            <a:r>
+              <a:rPr lang="en-US" sz="900" dirty="0">
+                <a:solidFill>
+                  <a:srgbClr val="5B6478"/>
+                </a:solidFill>
+                <a:latin typeface="Calibri" pitchFamily="34" charset="0"/>
+                <a:ea typeface="Calibri" pitchFamily="34" charset="-122"/>
+                <a:cs typeface="Calibri" pitchFamily="34" charset="-120"/>
+              </a:rPr>
+              <a:t>29</a:t>
+            </a:r>
+            <a:endParaRPr lang="en-US" sz="900" dirty="0"/>
+          </a:p>
+        </p:txBody>
+      </p:sp>
+      <p:pic>
+        <p:nvPicPr>
+          <p:cNvPr id="8" name="Picture 7" descr="seq-04-model-cache.png"/>
+          <p:cNvPicPr>
+            <a:picLocks noChangeAspect="1"/>
+          </p:cNvPicPr>
+          <p:nvPr/>
+        </p:nvPicPr>
+        <p:blipFill>
+          <a:blip r:embed="rId2"/>
+          <a:stretch>
+            <a:fillRect/>
+          </a:stretch>
+        </p:blipFill>
+        <p:spPr>
+          <a:xfrm>
+            <a:off x="2794006" y="1560000"/>
+            <a:ext cx="6603988" cy="4560000"/>
+          </a:xfrm>
+          <a:prstGeom prst="rect">
+            <a:avLst/>
+          </a:prstGeom>
+        </p:spPr>
+      </p:pic>
     </p:spTree>
   </p:cSld>
   <p:clrMapOvr>
@@ -21851,6 +22256,207 @@
           </a:p>
         </p:txBody>
       </p:sp>
+    </p:spTree>
+  </p:cSld>
+  <p:clrMapOvr>
+    <a:masterClrMapping/>
+  </p:clrMapOvr>
+</p:sld>
+</file>
+
+<file path=ppt/slides/slide40.xml><?xml version="1.0" encoding="utf-8"?>
+<p:sld xmlns:a="http://schemas.openxmlformats.org/drawingml/2006/main" xmlns:p="http://schemas.openxmlformats.org/presentationml/2006/main" xmlns:r="http://schemas.openxmlformats.org/officeDocument/2006/relationships">
+  <p:cSld>
+    <p:spTree>
+      <p:nvGrpSpPr>
+        <p:cNvPr id="1" name=""/>
+        <p:cNvGrpSpPr/>
+        <p:nvPr/>
+      </p:nvGrpSpPr>
+      <p:grpSpPr/>
+      <p:sp>
+        <p:nvSpPr>
+          <p:cNvPr id="2" name="Text 0"/>
+          <p:cNvSpPr/>
+          <p:nvPr/>
+        </p:nvSpPr>
+        <p:spPr>
+          <a:xfrm>
+            <a:off x="640080" y="365760"/>
+            <a:ext cx="10789920" cy="310896"/>
+          </a:xfrm>
+          <a:prstGeom prst="rect">
+            <a:avLst/>
+          </a:prstGeom>
+          <a:noFill/>
+          <a:ln/>
+        </p:spPr>
+        <p:txBody>
+          <a:bodyPr wrap="square" rtlCol="0" anchor="ctr"/>
+          <a:lstStyle/>
+          <a:p>
+            <a:pPr indent="0" marL="0">
+              <a:buNone/>
+            </a:pPr>
+            <a:r>
+              <a:rPr lang="en-US" sz="1200" b="1" spc="150" kern="0" dirty="0">
+                <a:solidFill>
+                  <a:srgbClr val="D9531E"/>
+                </a:solidFill>
+                <a:latin typeface="Calibri" pitchFamily="34" charset="0"/>
+                <a:ea typeface="Calibri" pitchFamily="34" charset="-122"/>
+                <a:cs typeface="Calibri" pitchFamily="34" charset="-120"/>
+              </a:rPr>
+              <a:t>ACT 3 · CODE LAYOUT</a:t>
+            </a:r>
+            <a:endParaRPr lang="en-US" sz="1200" dirty="0"/>
+          </a:p>
+        </p:txBody>
+      </p:sp>
+      <p:sp>
+        <p:nvSpPr>
+          <p:cNvPr id="3" name="Text 1"/>
+          <p:cNvSpPr/>
+          <p:nvPr/>
+        </p:nvSpPr>
+        <p:spPr>
+          <a:xfrm>
+            <a:off x="621792" y="621792"/>
+            <a:ext cx="10927080" cy="914400"/>
+          </a:xfrm>
+          <a:prstGeom prst="rect">
+            <a:avLst/>
+          </a:prstGeom>
+          <a:noFill/>
+          <a:ln/>
+        </p:spPr>
+        <p:txBody>
+          <a:bodyPr wrap="square" rtlCol="0" anchor="ctr"/>
+          <a:lstStyle/>
+          <a:p>
+            <a:pPr indent="0" marL="0">
+              <a:lnSpc>
+                <a:spcPct val="103000"/>
+              </a:lnSpc>
+              <a:buNone/>
+            </a:pPr>
+            <a:r>
+              <a:rPr lang="en-US" sz="2200" b="1" dirty="0">
+                <a:solidFill>
+                  <a:srgbClr val="1B2340"/>
+                </a:solidFill>
+                <a:latin typeface="Cambria" pitchFamily="34" charset="0"/>
+                <a:ea typeface="Cambria" pitchFamily="34" charset="-122"/>
+                <a:cs typeface="Cambria" pitchFamily="34" charset="-120"/>
+              </a:rPr>
+              <a:t>One hover, two questions — a provider answering only the first still crashes</a:t>
+            </a:r>
+            <a:endParaRPr lang="en-US" sz="2200" dirty="0"/>
+          </a:p>
+        </p:txBody>
+      </p:sp>
+      <p:sp>
+        <p:nvSpPr>
+          <p:cNvPr id="5" name="Text 3"/>
+          <p:cNvSpPr/>
+          <p:nvPr/>
+        </p:nvSpPr>
+        <p:spPr>
+          <a:xfrm>
+            <a:off x="640080" y="6199632"/>
+            <a:ext cx="10607040" cy="274320"/>
+          </a:xfrm>
+          <a:prstGeom prst="rect">
+            <a:avLst/>
+          </a:prstGeom>
+          <a:noFill/>
+          <a:ln/>
+        </p:spPr>
+        <p:txBody>
+          <a:bodyPr wrap="square" rtlCol="0" anchor="ctr"/>
+          <a:lstStyle/>
+          <a:p>
+            <a:pPr indent="0" marL="0">
+              <a:buNone/>
+            </a:pPr>
+            <a:r>
+              <a:rPr lang="en-US" sz="950" i="1" dirty="0">
+                <a:solidFill>
+                  <a:srgbClr val="5B6478"/>
+                </a:solidFill>
+                <a:latin typeface="Calibri" pitchFamily="34" charset="0"/>
+                <a:ea typeface="Calibri" pitchFamily="34" charset="-122"/>
+                <a:cs typeface="Calibri" pitchFamily="34" charset="-120"/>
+              </a:rPr>
+              <a:t>Source: docs/how-to/add-an-editor-feature.md “Quick documentation”; configset/solrconfig/documentation/SolrConfigDocumentationProvider.kt</a:t>
+            </a:r>
+            <a:endParaRPr lang="en-US" sz="950" dirty="0"/>
+          </a:p>
+        </p:txBody>
+      </p:sp>
+      <p:sp>
+        <p:nvSpPr>
+          <p:cNvPr id="7" name="Text 4"/>
+          <p:cNvSpPr/>
+          <p:nvPr/>
+        </p:nvSpPr>
+        <p:spPr>
+          <a:xfrm>
+            <a:off x="11368735" y="6473952"/>
+            <a:ext cx="457200" cy="274320"/>
+          </a:xfrm>
+          <a:prstGeom prst="rect">
+            <a:avLst/>
+          </a:prstGeom>
+          <a:noFill/>
+          <a:ln/>
+        </p:spPr>
+        <p:txBody>
+          <a:bodyPr wrap="square" rtlCol="0" anchor="ctr"/>
+          <a:lstStyle/>
+          <a:p>
+            <a:pPr algn="r" indent="0" marL="0">
+              <a:buNone/>
+            </a:pPr>
+            <a:r>
+              <a:rPr lang="en-US" sz="900" dirty="0">
+                <a:solidFill>
+                  <a:srgbClr val="5B6478"/>
+                </a:solidFill>
+                <a:latin typeface="Calibri" pitchFamily="34" charset="0"/>
+                <a:ea typeface="Calibri" pitchFamily="34" charset="-122"/>
+                <a:cs typeface="Calibri" pitchFamily="34" charset="-120"/>
+              </a:rPr>
+              <a:t>38</a:t>
+            </a:r>
+            <a:endParaRPr lang="en-US" sz="900" dirty="0"/>
+          </a:p>
+        </p:txBody>
+      </p:sp>
+      <p:pic>
+        <p:nvPicPr>
+          <p:cNvPr id="8" name="Picture 7" descr="seq-01-quick-documentation.png"/>
+          <p:cNvPicPr>
+            <a:picLocks noChangeAspect="1"/>
+          </p:cNvPicPr>
+          <p:nvPr/>
+        </p:nvPicPr>
+        <p:blipFill>
+          <a:blip r:embed="rId2"/>
+          <a:stretch>
+            <a:fillRect/>
+          </a:stretch>
+        </p:blipFill>
+        <p:spPr>
+          <a:xfrm>
+            <a:off x="1806029" y="1560000"/>
+            <a:ext cx="8579942" cy="4560000"/>
+          </a:xfrm>
+          <a:prstGeom prst="rect">
+            <a:avLst/>
+          </a:prstGeom>
+        </p:spPr>
+      </p:pic>
     </p:spTree>
   </p:cSld>
   <p:clrMapOvr>

--- a/docs/presentation/solr-intellij-plugin.pptx
+++ b/docs/presentation/solr-intellij-plugin.pptx
@@ -20756,7 +20756,7 @@
                 <a:ea typeface="Cambria" pitchFamily="34" charset="-122"/>
                 <a:cs typeface="Cambria" pitchFamily="34" charset="-120"/>
               </a:rPr>
-              <a:t>server/ — one package today, and where later work is told to go</a:t>
+              <a:t>server/ — six packages, and a test that enforces the boundary</a:t>
             </a:r>
             <a:endParaRPr lang="en-US" sz="2200" dirty="0"/>
           </a:p>
@@ -20801,7 +20801,7 @@
                 <a:ea typeface="Calibri" pitchFamily="34" charset="-122"/>
                 <a:cs typeface="Calibri" pitchFamily="34" charset="-120"/>
               </a:rPr>
-              <a:t>server.connection — SolrConnectionSettings, and nothing else.</a:t>
+              <a:t>connection · transport · reading · topology · query · drift.</a:t>
             </a:r>
             <a:endParaRPr lang="en-US" sz="1550" dirty="0"/>
           </a:p>
@@ -20825,7 +20825,7 @@
                 <a:ea typeface="Calibri" pitchFamily="34" charset="-122"/>
                 <a:cs typeface="Calibri" pitchFamily="34" charset="-120"/>
               </a:rPr>
-              <a:t>No HTTP client, no tool window, no query console, no drift view. Nothing on the editor path may reach it — configset editing works with zero connection configured, by design.</a:t>
+              <a:t>An HTTP client, a collections tool window, queries through the IDE's own HTTP Client, and a drift view that compares a configset against a collection. Nothing on the editor path may reach any of it — configset editing works with zero connection configured, by design.</a:t>
             </a:r>
             <a:endParaRPr lang="en-US" sz="1550" dirty="0"/>
           </a:p>
@@ -20965,7 +20965,7 @@
                 <a:ea typeface="Calibri" pitchFamily="34" charset="-122"/>
                 <a:cs typeface="Calibri" pitchFamily="34" charset="-120"/>
               </a:rPr>
-              <a:t>org.apache.solr.ide.server.* for the live-server surface and its HTTP client · a new surface, sibling to configset, the day the first Java/Kotlin recognizer is written · new packages are created when they have a file to hold, not in advance.</a:t>
+              <a:t>SolrServerBoundaryContractTest walks the source tree and fails on any package outside server/ that imports it — an allowlist of consumers, not a denylist of editor packages, because a list of what to forbid is wrong the day someone adds a package. Indexing test documents is the one server step not yet built.</a:t>
             </a:r>
             <a:endParaRPr lang="en-US" sz="1550" dirty="0"/>
           </a:p>
@@ -21004,7 +21004,7 @@
                 <a:ea typeface="Calibri" pitchFamily="34" charset="-122"/>
                 <a:cs typeface="Calibri" pitchFamily="34" charset="-120"/>
               </a:rPr>
-              <a:t>Source: docs/code-organization.md “server.connection”, “Where later work goes”; server/connection/SolrConnectionSettings.kt</a:t>
+              <a:t>Source: docs/code-organization.md “The server surface”; server/SolrServerBoundaryContractTest.kt</a:t>
             </a:r>
             <a:endParaRPr lang="en-US" sz="950" dirty="0"/>
           </a:p>
@@ -21228,7 +21228,7 @@
                 <a:ea typeface="Calibri" pitchFamily="34" charset="-122"/>
                 <a:cs typeface="Calibri" pitchFamily="34" charset="-120"/>
               </a:rPr>
-              <a:t>The Server and Code tracks are the other two-thirds of the spec, and they have not started.</a:t>
+              <a:t>The Server track has since shipped on the same terms — connections, a collections tool window, queries through the IDE's own HTTP Client, and a drift view that compares a configset against a live collection. Indexing test documents is what remains of it; the Code track has not started.</a:t>
             </a:r>
             <a:endParaRPr lang="en-US" sz="1600" dirty="0"/>
           </a:p>
@@ -21275,7 +21275,7 @@
                 <a:ea typeface="Calibri" pitchFamily="34" charset="-122"/>
                 <a:cs typeface="Calibri" pitchFamily="34" charset="-120"/>
               </a:rPr>
-              <a:t>github.com/adityamparikh/solr-intellij-plugin · branch feat/solrconfig-structure-completion</a:t>
+              <a:t>github.com/adityamparikh/solr-intellij-plugin · branch main</a:t>
             </a:r>
             <a:endParaRPr lang="en-US" sz="1600" dirty="0"/>
           </a:p>
